--- a/docs/sp_moe_pass.pptx
+++ b/docs/sp_moe_pass.pptx
@@ -212,7 +212,7 @@
           <a:p>
             <a:fld id="{D192D1E3-2004-453C-8097-1B80F42173C4}" type="datetimeFigureOut">
               <a:rPr lang="zh-CN" altLang="en-US" smtClean="0"/>
-              <a:t>2026/7/29</a:t>
+              <a:t>2026/8/5</a:t>
             </a:fld>
             <a:endParaRPr lang="zh-CN" altLang="en-US"/>
           </a:p>
@@ -742,7 +742,7 @@
           <a:p>
             <a:fld id="{5BCAD085-E8A6-8845-BD4E-CB4CCA059FC4}" type="datetimeFigureOut">
               <a:rPr lang="en-US" smtClean="0"/>
-              <a:t>7/29/2026</a:t>
+              <a:t>8/5/2026</a:t>
             </a:fld>
             <a:endParaRPr lang="en-US"/>
           </a:p>
@@ -910,7 +910,7 @@
           <a:p>
             <a:fld id="{5BCAD085-E8A6-8845-BD4E-CB4CCA059FC4}" type="datetimeFigureOut">
               <a:rPr lang="en-US" smtClean="0"/>
-              <a:t>7/29/2026</a:t>
+              <a:t>8/5/2026</a:t>
             </a:fld>
             <a:endParaRPr lang="en-US"/>
           </a:p>
@@ -1088,7 +1088,7 @@
           <a:p>
             <a:fld id="{5BCAD085-E8A6-8845-BD4E-CB4CCA059FC4}" type="datetimeFigureOut">
               <a:rPr lang="en-US" smtClean="0"/>
-              <a:t>7/29/2026</a:t>
+              <a:t>8/5/2026</a:t>
             </a:fld>
             <a:endParaRPr lang="en-US"/>
           </a:p>
@@ -1256,7 +1256,7 @@
           <a:p>
             <a:fld id="{5BCAD085-E8A6-8845-BD4E-CB4CCA059FC4}" type="datetimeFigureOut">
               <a:rPr lang="en-US" smtClean="0"/>
-              <a:t>7/29/2026</a:t>
+              <a:t>8/5/2026</a:t>
             </a:fld>
             <a:endParaRPr lang="en-US"/>
           </a:p>
@@ -1501,7 +1501,7 @@
           <a:p>
             <a:fld id="{5BCAD085-E8A6-8845-BD4E-CB4CCA059FC4}" type="datetimeFigureOut">
               <a:rPr lang="en-US" smtClean="0"/>
-              <a:t>7/29/2026</a:t>
+              <a:t>8/5/2026</a:t>
             </a:fld>
             <a:endParaRPr lang="en-US"/>
           </a:p>
@@ -1786,7 +1786,7 @@
           <a:p>
             <a:fld id="{5BCAD085-E8A6-8845-BD4E-CB4CCA059FC4}" type="datetimeFigureOut">
               <a:rPr lang="en-US" smtClean="0"/>
-              <a:t>7/29/2026</a:t>
+              <a:t>8/5/2026</a:t>
             </a:fld>
             <a:endParaRPr lang="en-US"/>
           </a:p>
@@ -2205,7 +2205,7 @@
           <a:p>
             <a:fld id="{5BCAD085-E8A6-8845-BD4E-CB4CCA059FC4}" type="datetimeFigureOut">
               <a:rPr lang="en-US" smtClean="0"/>
-              <a:t>7/29/2026</a:t>
+              <a:t>8/5/2026</a:t>
             </a:fld>
             <a:endParaRPr lang="en-US"/>
           </a:p>
@@ -2322,7 +2322,7 @@
           <a:p>
             <a:fld id="{5BCAD085-E8A6-8845-BD4E-CB4CCA059FC4}" type="datetimeFigureOut">
               <a:rPr lang="en-US" smtClean="0"/>
-              <a:t>7/29/2026</a:t>
+              <a:t>8/5/2026</a:t>
             </a:fld>
             <a:endParaRPr lang="en-US"/>
           </a:p>
@@ -2417,7 +2417,7 @@
           <a:p>
             <a:fld id="{5BCAD085-E8A6-8845-BD4E-CB4CCA059FC4}" type="datetimeFigureOut">
               <a:rPr lang="en-US" smtClean="0"/>
-              <a:t>7/29/2026</a:t>
+              <a:t>8/5/2026</a:t>
             </a:fld>
             <a:endParaRPr lang="en-US"/>
           </a:p>
@@ -2692,7 +2692,7 @@
           <a:p>
             <a:fld id="{5BCAD085-E8A6-8845-BD4E-CB4CCA059FC4}" type="datetimeFigureOut">
               <a:rPr lang="en-US" smtClean="0"/>
-              <a:t>7/29/2026</a:t>
+              <a:t>8/5/2026</a:t>
             </a:fld>
             <a:endParaRPr lang="en-US"/>
           </a:p>
@@ -2944,7 +2944,7 @@
           <a:p>
             <a:fld id="{5BCAD085-E8A6-8845-BD4E-CB4CCA059FC4}" type="datetimeFigureOut">
               <a:rPr lang="en-US" smtClean="0"/>
-              <a:t>7/29/2026</a:t>
+              <a:t>8/5/2026</a:t>
             </a:fld>
             <a:endParaRPr lang="en-US"/>
           </a:p>
@@ -3155,7 +3155,7 @@
           <a:p>
             <a:fld id="{5BCAD085-E8A6-8845-BD4E-CB4CCA059FC4}" type="datetimeFigureOut">
               <a:rPr lang="en-US" smtClean="0"/>
-              <a:t>7/29/2026</a:t>
+              <a:t>8/5/2026</a:t>
             </a:fld>
             <a:endParaRPr lang="en-US"/>
           </a:p>
@@ -7913,7 +7913,7 @@
               </a:lnSpc>
             </a:pPr>
             <a:r>
-              <a:rPr sz="950" b="1">
+              <a:rPr sz="950" b="1" dirty="0" err="1">
                 <a:solidFill>
                   <a:srgbClr val="FFFFFF"/>
                 </a:solidFill>
@@ -7921,15 +7921,21 @@
               </a:rPr>
               <a:t>moe_forward</a:t>
             </a:r>
-          </a:p>
-          <a:p>
-            <a:pPr algn="ctr">
-              <a:lnSpc>
-                <a:spcPct val="100000"/>
-              </a:lnSpc>
-            </a:pPr>
-            <a:r>
-              <a:rPr sz="700" b="0">
+            <a:endParaRPr sz="950" b="1" dirty="0">
+              <a:solidFill>
+                <a:srgbClr val="FFFFFF"/>
+              </a:solidFill>
+              <a:latin typeface="Consolas"/>
+            </a:endParaRPr>
+          </a:p>
+          <a:p>
+            <a:pPr algn="ctr">
+              <a:lnSpc>
+                <a:spcPct val="100000"/>
+              </a:lnSpc>
+            </a:pPr>
+            <a:r>
+              <a:rPr sz="700" b="0" dirty="0">
                 <a:solidFill>
                   <a:srgbClr val="FFFFFF"/>
                 </a:solidFill>
@@ -7938,13 +7944,49 @@
               <a:t>in [T/2, 2048] → out [T/2, 2048]</a:t>
             </a:r>
             <a:r>
-              <a:rPr sz="700" b="0">
-                <a:solidFill>
-                  <a:srgbClr val="FFFFFF"/>
-                </a:solidFill>
-                <a:latin typeface="Microsoft YaHei"/>
-              </a:rPr>
-              <a:t>  ·  输出直接交给下一层 norm（保持分片）</a:t>
+              <a:rPr sz="700" b="0" dirty="0">
+                <a:solidFill>
+                  <a:srgbClr val="FFFFFF"/>
+                </a:solidFill>
+                <a:latin typeface="Microsoft YaHei"/>
+              </a:rPr>
+              <a:t>  ·  </a:t>
+            </a:r>
+            <a:r>
+              <a:rPr sz="700" b="0" dirty="0" err="1">
+                <a:solidFill>
+                  <a:srgbClr val="FFFFFF"/>
+                </a:solidFill>
+                <a:latin typeface="Microsoft YaHei"/>
+              </a:rPr>
+              <a:t>输出直接交给下一层</a:t>
+            </a:r>
+            <a:r>
+              <a:rPr sz="700" b="0" dirty="0">
+                <a:solidFill>
+                  <a:srgbClr val="FFFFFF"/>
+                </a:solidFill>
+                <a:latin typeface="Microsoft YaHei"/>
+              </a:rPr>
+              <a:t> </a:t>
+            </a:r>
+            <a:r>
+              <a:rPr sz="700" b="0" dirty="0" err="1">
+                <a:solidFill>
+                  <a:srgbClr val="FFFFFF"/>
+                </a:solidFill>
+                <a:latin typeface="Microsoft YaHei"/>
+              </a:rPr>
+              <a:t>norm（保持分片</a:t>
+            </a:r>
+            <a:r>
+              <a:rPr sz="700" b="0" dirty="0">
+                <a:solidFill>
+                  <a:srgbClr val="FFFFFF"/>
+                </a:solidFill>
+                <a:latin typeface="Microsoft YaHei"/>
+              </a:rPr>
+              <a:t>）</a:t>
             </a:r>
           </a:p>
         </p:txBody>
@@ -9987,39 +10029,132 @@
               </a:lnSpc>
             </a:pPr>
             <a:r>
-              <a:rPr sz="950" b="1">
+              <a:rPr sz="950" b="1" dirty="0" err="1">
                 <a:solidFill>
                   <a:srgbClr val="FFFFFF"/>
                 </a:solidFill>
                 <a:latin typeface="Consolas"/>
               </a:rPr>
-              <a:t>reduce_scatter (TP)</a:t>
-            </a:r>
-          </a:p>
-          <a:p>
-            <a:pPr algn="ctr">
-              <a:lnSpc>
-                <a:spcPct val="100000"/>
-              </a:lnSpc>
-            </a:pPr>
-            <a:r>
-              <a:rPr sz="700" b="0">
+              <a:t>reduce_scatter</a:t>
+            </a:r>
+            <a:r>
+              <a:rPr sz="950" b="1" dirty="0">
                 <a:solidFill>
                   <a:srgbClr val="FFFFFF"/>
                 </a:solidFill>
                 <a:latin typeface="Consolas"/>
               </a:rPr>
+              <a:t> (TP)</a:t>
+            </a:r>
+            <a:r>
+              <a:rPr lang="en-US" sz="950" b="1" dirty="0">
+                <a:solidFill>
+                  <a:srgbClr val="FFFFFF"/>
+                </a:solidFill>
+                <a:latin typeface="Consolas"/>
+              </a:rPr>
+              <a:t>659</a:t>
+            </a:r>
+            <a:endParaRPr sz="950" b="1" dirty="0">
+              <a:solidFill>
+                <a:srgbClr val="FFFFFF"/>
+              </a:solidFill>
+              <a:latin typeface="Consolas"/>
+            </a:endParaRPr>
+          </a:p>
+          <a:p>
+            <a:pPr algn="ctr">
+              <a:lnSpc>
+                <a:spcPct val="100000"/>
+              </a:lnSpc>
+            </a:pPr>
+            <a:r>
+              <a:rPr sz="700" b="0" dirty="0">
+                <a:solidFill>
+                  <a:srgbClr val="FFFFFF"/>
+                </a:solidFill>
+                <a:latin typeface="Consolas"/>
+              </a:rPr>
               <a:t>[T, 2048] → [T/2, 2048]</a:t>
             </a:r>
             <a:r>
-              <a:rPr sz="700" b="0">
-                <a:solidFill>
-                  <a:srgbClr val="FFFFFF"/>
-                </a:solidFill>
-                <a:latin typeface="Microsoft YaHei"/>
-              </a:rPr>
-              <a:t>  ·  SP pass 替换点 ②：MoE 后的 maybe_all_reduce</a:t>
-            </a:r>
+              <a:rPr sz="700" b="0" dirty="0">
+                <a:solidFill>
+                  <a:srgbClr val="FFFFFF"/>
+                </a:solidFill>
+                <a:latin typeface="Microsoft YaHei"/>
+              </a:rPr>
+              <a:t>  ·  SP pass </a:t>
+            </a:r>
+            <a:r>
+              <a:rPr sz="700" b="0" dirty="0" err="1">
+                <a:solidFill>
+                  <a:srgbClr val="FFFFFF"/>
+                </a:solidFill>
+                <a:latin typeface="Microsoft YaHei"/>
+              </a:rPr>
+              <a:t>替换点</a:t>
+            </a:r>
+            <a:r>
+              <a:rPr sz="700" b="0" dirty="0">
+                <a:solidFill>
+                  <a:srgbClr val="FFFFFF"/>
+                </a:solidFill>
+                <a:latin typeface="Microsoft YaHei"/>
+              </a:rPr>
+              <a:t> ②：</a:t>
+            </a:r>
+            <a:r>
+              <a:rPr sz="700" b="0" dirty="0" err="1">
+                <a:solidFill>
+                  <a:srgbClr val="FFFFFF"/>
+                </a:solidFill>
+                <a:latin typeface="Microsoft YaHei"/>
+              </a:rPr>
+              <a:t>MoE</a:t>
+            </a:r>
+            <a:r>
+              <a:rPr sz="700" b="0" dirty="0">
+                <a:solidFill>
+                  <a:srgbClr val="FFFFFF"/>
+                </a:solidFill>
+                <a:latin typeface="Microsoft YaHei"/>
+              </a:rPr>
+              <a:t> </a:t>
+            </a:r>
+            <a:r>
+              <a:rPr sz="700" b="0" dirty="0" err="1">
+                <a:solidFill>
+                  <a:srgbClr val="FFFFFF"/>
+                </a:solidFill>
+                <a:latin typeface="Microsoft YaHei"/>
+              </a:rPr>
+              <a:t>后的</a:t>
+            </a:r>
+            <a:r>
+              <a:rPr sz="700" b="0" dirty="0">
+                <a:solidFill>
+                  <a:srgbClr val="FFFFFF"/>
+                </a:solidFill>
+                <a:latin typeface="Microsoft YaHei"/>
+              </a:rPr>
+              <a:t> </a:t>
+            </a:r>
+            <a:r>
+              <a:rPr sz="700" b="0" dirty="0" err="1">
+                <a:solidFill>
+                  <a:srgbClr val="FFFFFF"/>
+                </a:solidFill>
+                <a:latin typeface="Microsoft YaHei"/>
+              </a:rPr>
+              <a:t>maybe_all_reduce</a:t>
+            </a:r>
+            <a:endParaRPr sz="700" b="0" dirty="0">
+              <a:solidFill>
+                <a:srgbClr val="FFFFFF"/>
+              </a:solidFill>
+              <a:latin typeface="Microsoft YaHei"/>
+            </a:endParaRPr>
           </a:p>
         </p:txBody>
       </p:sp>
